--- a/decks/combined-waves/combined-waves_ch1_nature-of-waves.pptx
+++ b/decks/combined-waves/combined-waves_ch1_nature-of-waves.pptx
@@ -124,29 +124,29 @@
   <p:extLst>
     <p:ext uri="{521415D9-36F7-43E2-AB2F-B90AF26B5E84}">
       <p14:sectionLst xmlns:p14="http://schemas.microsoft.com/office/powerpoint/2010/main">
-        <p14:section name="Opening" id="{50c7d933-907c-2992-ed3c-4a1547989e99}">
+        <p14:section name="Opening" id="{219a0f12-c307-f9ac-7df5-d805bd04e4d5}">
           <p14:sldIdLst>
             <p14:sldId id="256"/>
           </p14:sldIdLst>
         </p14:section>
-        <p14:section name="Gate" id="{98d1d8ab-2541-9405-6e5d-ffdadfb58245}">
+        <p14:section name="Gate" id="{90019cad-b17e-ef50-ea7a-823d3e4fc3a6}">
           <p14:sldIdLst>
             <p14:sldId id="257"/>
             <p14:sldId id="258"/>
           </p14:sldIdLst>
         </p14:section>
-        <p14:section name="Pre-teach" id="{3cc27575-9c2a-d78d-5e97-17b0140615d9}">
+        <p14:section name="Pre-teach" id="{690f4a34-fa53-9d19-2c2b-d1768911afb7}">
           <p14:sldIdLst>
             <p14:sldId id="259"/>
           </p14:sldIdLst>
         </p14:section>
-        <p14:section name="Read-along" id="{d61b5b1e-29ec-2cdd-4272-879ebacff735}">
+        <p14:section name="Read-along" id="{46efb834-5464-1036-fb1c-5a264167ae22}">
           <p14:sldIdLst>
             <p14:sldId id="260"/>
             <p14:sldId id="261"/>
           </p14:sldIdLst>
         </p14:section>
-        <p14:section name="Teach" id="{965c8aa3-f2d1-abba-d7b1-780af6ea9dcc}">
+        <p14:section name="Teach" id="{b41a377f-f7cf-6b63-8f8a-8d92ee7fa89e}">
           <p14:sldIdLst>
             <p14:sldId id="262"/>
             <p14:sldId id="263"/>
@@ -155,19 +155,19 @@
             <p14:sldId id="266"/>
           </p14:sldIdLst>
         </p14:section>
-        <p14:section name="Routes" id="{c50018d3-7360-8af6-3ba7-00a39e8a6873}">
+        <p14:section name="Routes" id="{a2671b5f-e862-c43a-407b-9c19b609e794}">
           <p14:sldIdLst>
             <p14:sldId id="267"/>
             <p14:sldId id="268"/>
             <p14:sldId id="269"/>
           </p14:sldIdLst>
         </p14:section>
-        <p14:section name="Close" id="{20a9c1aa-ca20-dcc6-de4b-5338988bb5cf}">
+        <p14:section name="Close" id="{3f2f4cb5-1a27-5ab1-015c-28bb2c37cb5e}">
           <p14:sldIdLst>
             <p14:sldId id="270"/>
           </p14:sldIdLst>
         </p14:section>
-        <p14:section name="Answers" id="{56372be5-791e-1713-e83b-2e817ad810bd}">
+        <p14:section name="Answers" id="{adaf98d9-1d80-ccf0-00ef-50d818bc659c}">
           <p14:sldIdLst>
             <p14:sldId id="271"/>
             <p14:sldId id="272"/>
@@ -1229,7 +1229,7 @@
             <a:r>
               <a:rPr lang="en-US" dirty="0"/>
               <a:t>Answers — task 1: Transverse or longitudinal?. Reveal the answer; pupils mark their own work in a different colour, then read the "why" together. Same destination for every lane, so one answer serves the whole class.
-Answer: A   longitudinal, because the coils vibrate parallel to the direction the wave travels
+Answer: D   longitudinal, because the coils vibrate parallel to the direction the wave travels
 Why: The vibration (backwards and forwards along the spring) is parallel to the direction the wave travels, so the wave is longitudinal.
 Ask a Support pupil to explain one step, and a Stretch pupil to share their extension.</a:t>
             </a:r>
@@ -1506,7 +1506,7 @@
               <a:t>Do now — retrieval. Silent, no notes, no help: recall comes before any support. Give about four minutes.
 1. In a transverse wave, the vibrations are ___ to the direction of energy transfer.  →  at right angles
 2. Which of these is a longitudinal wave?  →  B   a sound wave
-3. What does a wave transfer from one place to another?  →  A   energy
+3. What does a wave transfer from one place to another?  →  C   energy
 Circulate: who gets 3/3 (Stretch route), 2/3 (Core), 0–1 (Support)? Use this to route pupils later in the lesson.</a:t>
             </a:r>
             <a:endParaRPr lang="en-US" dirty="0"/>
@@ -1598,7 +1598,7 @@
               <a:t>Answers — pupils mark their own in a different colour, then hands up for 3/3, 2/3, 1/3.
 1. at right angles. Transverse means across: the vibrations are at right angles (perpendicular) to the direction the wave travels.
 2. B   a sound wave. Sound is longitudinal: the air vibrates backwards and forwards along the direction the sound travels, making compressions and rarefactions.
-3. A   energy. A wave transfers energy (and information) without transferring matter. The material vibrates on the spot.
+3. C   energy. A wave transfers energy (and information) without transferring matter. The material vibrates on the spot.
 Say the route each score points to: 3/3 Stretch, 2/3 Core, 0–1 Support. Pupils may choose to move up.</a:t>
             </a:r>
             <a:endParaRPr lang="en-US" dirty="0"/>
@@ -5444,7 +5444,7 @@
                 <a:ea typeface="Calibri" pitchFamily="34" charset="-122"/>
                 <a:cs typeface="Calibri" pitchFamily="34" charset="-120"/>
               </a:rPr>
-              <a:t>longitudinal, because the coils vibrate parallel to the direction the wave travels</a:t>
+              <a:t>transverse, because the coils vibrate at right angles to the direction the wave travels</a:t>
             </a:r>
             <a:endParaRPr lang="en-US" sz="2600" dirty="0"/>
           </a:p>
@@ -5481,7 +5481,7 @@
                 <a:ea typeface="Calibri" pitchFamily="34" charset="-122"/>
                 <a:cs typeface="Calibri" pitchFamily="34" charset="-120"/>
               </a:rPr>
-              <a:t>transverse, because the coils vibrate at right angles to the direction the wave travels</a:t>
+              <a:t>transverse, because the wave travels along the spring</a:t>
             </a:r>
             <a:endParaRPr lang="en-US" sz="2600" dirty="0"/>
           </a:p>
@@ -5555,7 +5555,7 @@
                 <a:ea typeface="Calibri" pitchFamily="34" charset="-122"/>
                 <a:cs typeface="Calibri" pitchFamily="34" charset="-120"/>
               </a:rPr>
-              <a:t>transverse, because the wave travels along the spring</a:t>
+              <a:t>longitudinal, because the coils vibrate parallel to the direction the wave travels</a:t>
             </a:r>
             <a:endParaRPr lang="en-US" sz="2600" dirty="0"/>
           </a:p>
@@ -8326,7 +8326,7 @@
                 <a:ea typeface="Cambria" pitchFamily="34" charset="-122"/>
                 <a:cs typeface="Cambria" pitchFamily="34" charset="-120"/>
               </a:rPr>
-              <a:t>A   longitudinal, because the coils vibrate parallel to the direction the wave travels</a:t>
+              <a:t>D   longitudinal, because the coils vibrate parallel to the direction the wave travels</a:t>
             </a:r>
             <a:endParaRPr lang="en-US" sz="1800" dirty="0"/>
           </a:p>
@@ -10293,7 +10293,7 @@
                 <a:ea typeface="Calibri" pitchFamily="34" charset="-122"/>
                 <a:cs typeface="Calibri" pitchFamily="34" charset="-120"/>
               </a:rPr>
-              <a:t>a light wave</a:t>
+              <a:t>a wave on a shaken rope</a:t>
             </a:r>
             <a:endParaRPr lang="en-US" sz="2400" dirty="0"/>
           </a:p>
@@ -10330,7 +10330,7 @@
                 <a:ea typeface="Calibri" pitchFamily="34" charset="-122"/>
                 <a:cs typeface="Calibri" pitchFamily="34" charset="-120"/>
               </a:rPr>
-              <a:t>a wave on a shaken rope</a:t>
+              <a:t>a light wave</a:t>
             </a:r>
             <a:endParaRPr lang="en-US" sz="2400" dirty="0"/>
           </a:p>
@@ -10534,7 +10534,7 @@
                 <a:ea typeface="Calibri" pitchFamily="34" charset="-122"/>
                 <a:cs typeface="Calibri" pitchFamily="34" charset="-120"/>
               </a:rPr>
-              <a:t>energy</a:t>
+              <a:t>water</a:t>
             </a:r>
             <a:endParaRPr lang="en-US" sz="2400" dirty="0"/>
           </a:p>
@@ -10571,7 +10571,7 @@
                 <a:ea typeface="Calibri" pitchFamily="34" charset="-122"/>
                 <a:cs typeface="Calibri" pitchFamily="34" charset="-120"/>
               </a:rPr>
-              <a:t>matter</a:t>
+              <a:t>particles</a:t>
             </a:r>
             <a:endParaRPr lang="en-US" sz="2400" dirty="0"/>
           </a:p>
@@ -10608,7 +10608,7 @@
                 <a:ea typeface="Calibri" pitchFamily="34" charset="-122"/>
                 <a:cs typeface="Calibri" pitchFamily="34" charset="-120"/>
               </a:rPr>
-              <a:t>particles</a:t>
+              <a:t>energy</a:t>
             </a:r>
             <a:endParaRPr lang="en-US" sz="2400" dirty="0"/>
           </a:p>
@@ -10645,7 +10645,7 @@
                 <a:ea typeface="Calibri" pitchFamily="34" charset="-122"/>
                 <a:cs typeface="Calibri" pitchFamily="34" charset="-120"/>
               </a:rPr>
-              <a:t>water</a:t>
+              <a:t>matter</a:t>
             </a:r>
             <a:endParaRPr lang="en-US" sz="2400" dirty="0"/>
           </a:p>
@@ -11546,7 +11546,7 @@
                 <a:ea typeface="Calibri" pitchFamily="34" charset="-122"/>
                 <a:cs typeface="Calibri" pitchFamily="34" charset="-120"/>
               </a:rPr>
-              <a:t>A   energy</a:t>
+              <a:t>C   energy</a:t>
             </a:r>
             <a:endParaRPr lang="en-US" sz="2200" dirty="0"/>
           </a:p>

--- a/decks/combined-waves/combined-waves_ch1_nature-of-waves.pptx
+++ b/decks/combined-waves/combined-waves_ch1_nature-of-waves.pptx
@@ -124,29 +124,29 @@
   <p:extLst>
     <p:ext uri="{521415D9-36F7-43E2-AB2F-B90AF26B5E84}">
       <p14:sectionLst xmlns:p14="http://schemas.microsoft.com/office/powerpoint/2010/main">
-        <p14:section name="Opening" id="{219a0f12-c307-f9ac-7df5-d805bd04e4d5}">
+        <p14:section name="Opening" id="{49ee2ca0-48d6-83f5-ee10-8afb1332b765}">
           <p14:sldIdLst>
             <p14:sldId id="256"/>
           </p14:sldIdLst>
         </p14:section>
-        <p14:section name="Gate" id="{90019cad-b17e-ef50-ea7a-823d3e4fc3a6}">
+        <p14:section name="Gate" id="{650047ac-23a7-b68c-cc68-2dfc211e5d44}">
           <p14:sldIdLst>
             <p14:sldId id="257"/>
             <p14:sldId id="258"/>
           </p14:sldIdLst>
         </p14:section>
-        <p14:section name="Pre-teach" id="{690f4a34-fa53-9d19-2c2b-d1768911afb7}">
+        <p14:section name="Pre-teach" id="{785dac02-0237-409e-3722-31c8199c1d78}">
           <p14:sldIdLst>
             <p14:sldId id="259"/>
           </p14:sldIdLst>
         </p14:section>
-        <p14:section name="Read-along" id="{46efb834-5464-1036-fb1c-5a264167ae22}">
+        <p14:section name="Read-along" id="{c224693a-045b-0c10-7bc6-e341c36c1f2c}">
           <p14:sldIdLst>
             <p14:sldId id="260"/>
             <p14:sldId id="261"/>
           </p14:sldIdLst>
         </p14:section>
-        <p14:section name="Teach" id="{b41a377f-f7cf-6b63-8f8a-8d92ee7fa89e}">
+        <p14:section name="Teach" id="{a8484ca0-c07f-8358-cfbc-ccc58e9dc6a8}">
           <p14:sldIdLst>
             <p14:sldId id="262"/>
             <p14:sldId id="263"/>
@@ -155,19 +155,19 @@
             <p14:sldId id="266"/>
           </p14:sldIdLst>
         </p14:section>
-        <p14:section name="Routes" id="{a2671b5f-e862-c43a-407b-9c19b609e794}">
+        <p14:section name="Routes" id="{aee67f10-8380-3cc3-e3c9-415b95afa5ab}">
           <p14:sldIdLst>
             <p14:sldId id="267"/>
             <p14:sldId id="268"/>
             <p14:sldId id="269"/>
           </p14:sldIdLst>
         </p14:section>
-        <p14:section name="Close" id="{3f2f4cb5-1a27-5ab1-015c-28bb2c37cb5e}">
+        <p14:section name="Close" id="{eb23fdbb-42fd-f96e-44fe-535ee6260a28}">
           <p14:sldIdLst>
             <p14:sldId id="270"/>
           </p14:sldIdLst>
         </p14:section>
-        <p14:section name="Answers" id="{adaf98d9-1d80-ccf0-00ef-50d818bc659c}">
+        <p14:section name="Answers" id="{e35e4c08-14f2-de3b-2e0f-09644cf4aed8}">
           <p14:sldIdLst>
             <p14:sldId id="271"/>
             <p14:sldId id="272"/>
